--- a/templates/FACA_Report_with_reference.pptx
+++ b/templates/FACA_Report_with_reference.pptx
@@ -64,10 +64,10 @@
         </a:solidFill>
         <a:effectLst/>
         <a:uFillTx/>
-        <a:latin typeface="+mj-lt"/>
-        <a:ea typeface="+mj-ea"/>
-        <a:cs typeface="+mj-cs"/>
-        <a:sym typeface="Helvetica"/>
+        <a:latin typeface="+mn-lt"/>
+        <a:ea typeface="+mn-ea"/>
+        <a:cs typeface="+mn-cs"/>
+        <a:sym typeface="Helvetica Neue"/>
       </a:defRPr>
     </a:lvl1pPr>
     <a:lvl2pPr marL="0" marR="0" indent="0" algn="ctr" defTabSz="825500" rtl="0" fontAlgn="auto" latinLnBrk="0" hangingPunct="0">
@@ -94,10 +94,10 @@
         </a:solidFill>
         <a:effectLst/>
         <a:uFillTx/>
-        <a:latin typeface="+mj-lt"/>
-        <a:ea typeface="+mj-ea"/>
-        <a:cs typeface="+mj-cs"/>
-        <a:sym typeface="Helvetica"/>
+        <a:latin typeface="+mn-lt"/>
+        <a:ea typeface="+mn-ea"/>
+        <a:cs typeface="+mn-cs"/>
+        <a:sym typeface="Helvetica Neue"/>
       </a:defRPr>
     </a:lvl2pPr>
     <a:lvl3pPr marL="0" marR="0" indent="0" algn="ctr" defTabSz="825500" rtl="0" fontAlgn="auto" latinLnBrk="0" hangingPunct="0">
@@ -124,10 +124,10 @@
         </a:solidFill>
         <a:effectLst/>
         <a:uFillTx/>
-        <a:latin typeface="+mj-lt"/>
-        <a:ea typeface="+mj-ea"/>
-        <a:cs typeface="+mj-cs"/>
-        <a:sym typeface="Helvetica"/>
+        <a:latin typeface="+mn-lt"/>
+        <a:ea typeface="+mn-ea"/>
+        <a:cs typeface="+mn-cs"/>
+        <a:sym typeface="Helvetica Neue"/>
       </a:defRPr>
     </a:lvl3pPr>
     <a:lvl4pPr marL="0" marR="0" indent="0" algn="ctr" defTabSz="825500" rtl="0" fontAlgn="auto" latinLnBrk="0" hangingPunct="0">
@@ -154,10 +154,10 @@
         </a:solidFill>
         <a:effectLst/>
         <a:uFillTx/>
-        <a:latin typeface="+mj-lt"/>
-        <a:ea typeface="+mj-ea"/>
-        <a:cs typeface="+mj-cs"/>
-        <a:sym typeface="Helvetica"/>
+        <a:latin typeface="+mn-lt"/>
+        <a:ea typeface="+mn-ea"/>
+        <a:cs typeface="+mn-cs"/>
+        <a:sym typeface="Helvetica Neue"/>
       </a:defRPr>
     </a:lvl4pPr>
     <a:lvl5pPr marL="0" marR="0" indent="0" algn="ctr" defTabSz="825500" rtl="0" fontAlgn="auto" latinLnBrk="0" hangingPunct="0">
@@ -184,10 +184,10 @@
         </a:solidFill>
         <a:effectLst/>
         <a:uFillTx/>
-        <a:latin typeface="+mj-lt"/>
-        <a:ea typeface="+mj-ea"/>
-        <a:cs typeface="+mj-cs"/>
-        <a:sym typeface="Helvetica"/>
+        <a:latin typeface="+mn-lt"/>
+        <a:ea typeface="+mn-ea"/>
+        <a:cs typeface="+mn-cs"/>
+        <a:sym typeface="Helvetica Neue"/>
       </a:defRPr>
     </a:lvl5pPr>
     <a:lvl6pPr marL="0" marR="0" indent="0" algn="ctr" defTabSz="825500" rtl="0" fontAlgn="auto" latinLnBrk="0" hangingPunct="0">
@@ -214,10 +214,10 @@
         </a:solidFill>
         <a:effectLst/>
         <a:uFillTx/>
-        <a:latin typeface="+mj-lt"/>
-        <a:ea typeface="+mj-ea"/>
-        <a:cs typeface="+mj-cs"/>
-        <a:sym typeface="Helvetica"/>
+        <a:latin typeface="+mn-lt"/>
+        <a:ea typeface="+mn-ea"/>
+        <a:cs typeface="+mn-cs"/>
+        <a:sym typeface="Helvetica Neue"/>
       </a:defRPr>
     </a:lvl6pPr>
     <a:lvl7pPr marL="0" marR="0" indent="0" algn="ctr" defTabSz="825500" rtl="0" fontAlgn="auto" latinLnBrk="0" hangingPunct="0">
@@ -244,10 +244,10 @@
         </a:solidFill>
         <a:effectLst/>
         <a:uFillTx/>
-        <a:latin typeface="+mj-lt"/>
-        <a:ea typeface="+mj-ea"/>
-        <a:cs typeface="+mj-cs"/>
-        <a:sym typeface="Helvetica"/>
+        <a:latin typeface="+mn-lt"/>
+        <a:ea typeface="+mn-ea"/>
+        <a:cs typeface="+mn-cs"/>
+        <a:sym typeface="Helvetica Neue"/>
       </a:defRPr>
     </a:lvl7pPr>
     <a:lvl8pPr marL="0" marR="0" indent="0" algn="ctr" defTabSz="825500" rtl="0" fontAlgn="auto" latinLnBrk="0" hangingPunct="0">
@@ -274,10 +274,10 @@
         </a:solidFill>
         <a:effectLst/>
         <a:uFillTx/>
-        <a:latin typeface="+mj-lt"/>
-        <a:ea typeface="+mj-ea"/>
-        <a:cs typeface="+mj-cs"/>
-        <a:sym typeface="Helvetica"/>
+        <a:latin typeface="+mn-lt"/>
+        <a:ea typeface="+mn-ea"/>
+        <a:cs typeface="+mn-cs"/>
+        <a:sym typeface="Helvetica Neue"/>
       </a:defRPr>
     </a:lvl8pPr>
     <a:lvl9pPr marL="0" marR="0" indent="0" algn="ctr" defTabSz="825500" rtl="0" fontAlgn="auto" latinLnBrk="0" hangingPunct="0">
@@ -304,10 +304,10 @@
         </a:solidFill>
         <a:effectLst/>
         <a:uFillTx/>
-        <a:latin typeface="+mj-lt"/>
-        <a:ea typeface="+mj-ea"/>
-        <a:cs typeface="+mj-cs"/>
-        <a:sym typeface="Helvetica"/>
+        <a:latin typeface="+mn-lt"/>
+        <a:ea typeface="+mn-ea"/>
+        <a:cs typeface="+mn-cs"/>
+        <a:sym typeface="Helvetica Neue"/>
       </a:defRPr>
     </a:lvl9pPr>
   </p:defaultTextStyle>
@@ -683,7 +683,7 @@
         </p:nvSpPr>
         <p:spPr>
           <a:xfrm>
-            <a:off x="517066" y="1257300"/>
+            <a:off x="517067" y="1257300"/>
             <a:ext cx="23315955" cy="0"/>
           </a:xfrm>
           <a:prstGeom prst="line">
@@ -1145,8 +1145,8 @@
         </p:nvSpPr>
         <p:spPr>
           <a:xfrm>
-            <a:off x="517049" y="1244599"/>
-            <a:ext cx="23315963" cy="10"/>
+            <a:off x="517048" y="1244599"/>
+            <a:ext cx="23315963" cy="11"/>
           </a:xfrm>
           <a:prstGeom prst="line">
             <a:avLst/>
@@ -1487,7 +1487,7 @@
         </p:nvSpPr>
         <p:spPr>
           <a:xfrm>
-            <a:off x="517066" y="1257300"/>
+            <a:off x="517067" y="1257300"/>
             <a:ext cx="23315955" cy="0"/>
           </a:xfrm>
           <a:prstGeom prst="line">
@@ -3003,8 +3003,8 @@
         </p:nvSpPr>
         <p:spPr>
           <a:xfrm>
-            <a:off x="593100" y="881059"/>
-            <a:ext cx="23197815" cy="10"/>
+            <a:off x="593101" y="881059"/>
+            <a:ext cx="23197815" cy="11"/>
           </a:xfrm>
           <a:prstGeom prst="line">
             <a:avLst/>
@@ -3306,7 +3306,7 @@
         <p:spPr>
           <a:xfrm>
             <a:off x="1201340" y="11859862"/>
-            <a:ext cx="21971005" cy="636989"/>
+            <a:ext cx="21971005" cy="636990"/>
           </a:xfrm>
           <a:prstGeom prst="rect">
             <a:avLst/>
@@ -3578,8 +3578,8 @@
         </p:nvSpPr>
         <p:spPr>
           <a:xfrm>
-            <a:off x="517047" y="1257299"/>
-            <a:ext cx="23315963" cy="10"/>
+            <a:off x="517046" y="1257299"/>
+            <a:ext cx="23315963" cy="11"/>
           </a:xfrm>
           <a:prstGeom prst="line">
             <a:avLst/>
@@ -4974,7 +4974,7 @@
         <p:spPr>
           <a:xfrm>
             <a:off x="12963286" y="1049734"/>
-            <a:ext cx="10768258" cy="406401"/>
+            <a:ext cx="10768259" cy="406401"/>
           </a:xfrm>
           <a:prstGeom prst="rect">
             <a:avLst/>
@@ -6009,16 +6009,7 @@
           <a:bodyPr wrap="none" lIns="50800" tIns="50800" rIns="50800" bIns="50800" anchor="ctr">
             <a:spAutoFit/>
           </a:bodyPr>
-          <a:lstStyle>
-            <a:lvl1pPr>
-              <a:defRPr>
-                <a:latin typeface="+mn-lt"/>
-                <a:ea typeface="+mn-ea"/>
-                <a:cs typeface="+mn-cs"/>
-                <a:sym typeface="Helvetica Neue"/>
-              </a:defRPr>
-            </a:lvl1pPr>
-          </a:lstStyle>
+          <a:lstStyle/>
           <a:p>
             <a:pPr/>
             <a:r>
@@ -6055,8 +6046,13 @@
             <a:spAutoFit/>
           </a:bodyPr>
           <a:lstStyle>
-            <a:lvl1pPr>
-              <a:defRPr sz="1200"/>
+            <a:lvl1pPr algn="l">
+              <a:defRPr sz="1200">
+                <a:latin typeface="+mj-lt"/>
+                <a:ea typeface="+mj-ea"/>
+                <a:cs typeface="+mj-cs"/>
+                <a:sym typeface="Helvetica"/>
+              </a:defRPr>
             </a:lvl1pPr>
           </a:lstStyle>
           <a:p>
@@ -6076,7 +6072,7 @@
         <p:spPr>
           <a:xfrm>
             <a:off x="10782299" y="7239000"/>
-            <a:ext cx="11785606" cy="279400"/>
+            <a:ext cx="11785607" cy="279400"/>
           </a:xfrm>
           <a:prstGeom prst="rect">
             <a:avLst/>
@@ -6095,8 +6091,13 @@
             <a:spAutoFit/>
           </a:bodyPr>
           <a:lstStyle>
-            <a:lvl1pPr>
-              <a:defRPr sz="1200"/>
+            <a:lvl1pPr algn="l">
+              <a:defRPr sz="1200">
+                <a:latin typeface="+mj-lt"/>
+                <a:ea typeface="+mj-ea"/>
+                <a:cs typeface="+mj-cs"/>
+                <a:sym typeface="Helvetica"/>
+              </a:defRPr>
             </a:lvl1pPr>
           </a:lstStyle>
           <a:p>
@@ -6347,10 +6348,10 @@
             </a:solidFill>
             <a:effectLst/>
             <a:uFillTx/>
-            <a:latin typeface="+mj-lt"/>
-            <a:ea typeface="+mj-ea"/>
-            <a:cs typeface="+mj-cs"/>
-            <a:sym typeface="Helvetica"/>
+            <a:latin typeface="+mn-lt"/>
+            <a:ea typeface="+mn-ea"/>
+            <a:cs typeface="+mn-cs"/>
+            <a:sym typeface="Helvetica Neue"/>
           </a:defRPr>
         </a:defPPr>
         <a:lvl1pPr marL="0" marR="0" indent="0" algn="l" defTabSz="914400" rtl="0" fontAlgn="auto" latinLnBrk="1" hangingPunct="0">
@@ -6918,10 +6919,10 @@
             </a:solidFill>
             <a:effectLst/>
             <a:uFillTx/>
-            <a:latin typeface="+mj-lt"/>
-            <a:ea typeface="+mj-ea"/>
-            <a:cs typeface="+mj-cs"/>
-            <a:sym typeface="Helvetica"/>
+            <a:latin typeface="+mn-lt"/>
+            <a:ea typeface="+mn-ea"/>
+            <a:cs typeface="+mn-cs"/>
+            <a:sym typeface="Helvetica Neue"/>
           </a:defRPr>
         </a:defPPr>
         <a:lvl1pPr marL="0" marR="0" indent="0" algn="l" defTabSz="914400" rtl="0" fontAlgn="auto" latinLnBrk="1" hangingPunct="0">
@@ -7401,10 +7402,10 @@
             </a:solidFill>
             <a:effectLst/>
             <a:uFillTx/>
-            <a:latin typeface="+mj-lt"/>
-            <a:ea typeface="+mj-ea"/>
-            <a:cs typeface="+mj-cs"/>
-            <a:sym typeface="Helvetica"/>
+            <a:latin typeface="+mn-lt"/>
+            <a:ea typeface="+mn-ea"/>
+            <a:cs typeface="+mn-cs"/>
+            <a:sym typeface="Helvetica Neue"/>
           </a:defRPr>
         </a:defPPr>
         <a:lvl1pPr marL="0" marR="0" indent="0" algn="l" defTabSz="914400" rtl="0" fontAlgn="auto" latinLnBrk="1" hangingPunct="0">
@@ -7972,10 +7973,10 @@
             </a:solidFill>
             <a:effectLst/>
             <a:uFillTx/>
-            <a:latin typeface="+mj-lt"/>
-            <a:ea typeface="+mj-ea"/>
-            <a:cs typeface="+mj-cs"/>
-            <a:sym typeface="Helvetica"/>
+            <a:latin typeface="+mn-lt"/>
+            <a:ea typeface="+mn-ea"/>
+            <a:cs typeface="+mn-cs"/>
+            <a:sym typeface="Helvetica Neue"/>
           </a:defRPr>
         </a:defPPr>
         <a:lvl1pPr marL="0" marR="0" indent="0" algn="l" defTabSz="914400" rtl="0" fontAlgn="auto" latinLnBrk="1" hangingPunct="0">
